--- a/홈페이지 추가 자료.pptx
+++ b/홈페이지 추가 자료.pptx
@@ -3447,7 +3447,7 @@
         </p:blipFill>
         <p:spPr>
           <a:xfrm>
-            <a:off x="219749" y="3528693"/>
+            <a:off x="406400" y="3581399"/>
             <a:ext cx="8340051" cy="3029975"/>
           </a:xfrm>
           <a:prstGeom prst="rect">
@@ -3455,75 +3455,6 @@
           </a:prstGeom>
         </p:spPr>
       </p:pic>
-      <p:pic>
-        <p:nvPicPr>
-          <p:cNvPr id="12" name="그림 11">
-            <a:extLst>
-              <a:ext uri="{FF2B5EF4-FFF2-40B4-BE49-F238E27FC236}">
-                <a16:creationId xmlns:a16="http://schemas.microsoft.com/office/drawing/2014/main" id="{51AE3ACC-D22C-4E2E-AA62-75498405E8FD}"/>
-              </a:ext>
-            </a:extLst>
-          </p:cNvPr>
-          <p:cNvPicPr>
-            <a:picLocks noChangeAspect="1"/>
-          </p:cNvPicPr>
-          <p:nvPr/>
-        </p:nvPicPr>
-        <p:blipFill>
-          <a:blip r:embed="rId5"/>
-          <a:stretch>
-            <a:fillRect/>
-          </a:stretch>
-        </p:blipFill>
-        <p:spPr>
-          <a:xfrm>
-            <a:off x="0" y="7074269"/>
-            <a:ext cx="9906000" cy="652411"/>
-          </a:xfrm>
-          <a:prstGeom prst="rect">
-            <a:avLst/>
-          </a:prstGeom>
-        </p:spPr>
-      </p:pic>
-      <p:cxnSp>
-        <p:nvCxnSpPr>
-          <p:cNvPr id="15" name="직선 화살표 연결선 14">
-            <a:extLst>
-              <a:ext uri="{FF2B5EF4-FFF2-40B4-BE49-F238E27FC236}">
-                <a16:creationId xmlns:a16="http://schemas.microsoft.com/office/drawing/2014/main" id="{6E37E0F2-D84D-4DBF-8C2A-86BFF6810BBE}"/>
-              </a:ext>
-            </a:extLst>
-          </p:cNvPr>
-          <p:cNvCxnSpPr/>
-          <p:nvPr/>
-        </p:nvCxnSpPr>
-        <p:spPr>
-          <a:xfrm flipH="1">
-            <a:off x="2316480" y="7536180"/>
-            <a:ext cx="4838700" cy="381000"/>
-          </a:xfrm>
-          <a:prstGeom prst="straightConnector1">
-            <a:avLst/>
-          </a:prstGeom>
-          <a:ln>
-            <a:tailEnd type="triangle"/>
-          </a:ln>
-        </p:spPr>
-        <p:style>
-          <a:lnRef idx="1">
-            <a:schemeClr val="accent1"/>
-          </a:lnRef>
-          <a:fillRef idx="0">
-            <a:schemeClr val="accent1"/>
-          </a:fillRef>
-          <a:effectRef idx="0">
-            <a:schemeClr val="accent1"/>
-          </a:effectRef>
-          <a:fontRef idx="minor">
-            <a:schemeClr val="tx1"/>
-          </a:fontRef>
-        </p:style>
-      </p:cxnSp>
     </p:spTree>
     <p:extLst>
       <p:ext uri="{BB962C8B-B14F-4D97-AF65-F5344CB8AC3E}">
@@ -3636,7 +3567,7 @@
         </p:blipFill>
         <p:spPr>
           <a:xfrm>
-            <a:off x="858838" y="0"/>
+            <a:off x="1345406" y="0"/>
             <a:ext cx="7215187" cy="6858000"/>
           </a:xfrm>
           <a:prstGeom prst="rect">
@@ -3698,36 +3629,6 @@
           <a:xfrm>
             <a:off x="1317909" y="0"/>
             <a:ext cx="7270181" cy="6858000"/>
-          </a:xfrm>
-          <a:prstGeom prst="rect">
-            <a:avLst/>
-          </a:prstGeom>
-        </p:spPr>
-      </p:pic>
-      <p:pic>
-        <p:nvPicPr>
-          <p:cNvPr id="4" name="그림 3">
-            <a:extLst>
-              <a:ext uri="{FF2B5EF4-FFF2-40B4-BE49-F238E27FC236}">
-                <a16:creationId xmlns:a16="http://schemas.microsoft.com/office/drawing/2014/main" id="{0D059049-D1CC-4AA4-AED8-19C2E4E9C7A1}"/>
-              </a:ext>
-            </a:extLst>
-          </p:cNvPr>
-          <p:cNvPicPr>
-            <a:picLocks noChangeAspect="1"/>
-          </p:cNvPicPr>
-          <p:nvPr/>
-        </p:nvPicPr>
-        <p:blipFill>
-          <a:blip r:embed="rId3"/>
-          <a:stretch>
-            <a:fillRect/>
-          </a:stretch>
-        </p:blipFill>
-        <p:spPr>
-          <a:xfrm>
-            <a:off x="0" y="3102794"/>
-            <a:ext cx="9906000" cy="652411"/>
           </a:xfrm>
           <a:prstGeom prst="rect">
             <a:avLst/>
@@ -3906,7 +3807,7 @@
         </p:blipFill>
         <p:spPr>
           <a:xfrm>
-            <a:off x="447921" y="261506"/>
+            <a:off x="1028152" y="337706"/>
             <a:ext cx="7849695" cy="6182588"/>
           </a:xfrm>
           <a:prstGeom prst="rect">
